--- a/Cellular Automata.pptx
+++ b/Cellular Automata.pptx
@@ -140,7 +140,7 @@
 <file path=ppt/revisionInfo.xml><?xml version="1.0" encoding="utf-8"?>
 <p1510:revInfo xmlns:a="http://schemas.openxmlformats.org/drawingml/2006/main" xmlns:r="http://schemas.openxmlformats.org/officeDocument/2006/relationships" xmlns:p1510="http://schemas.microsoft.com/office/powerpoint/2015/10/main">
   <p1510:revLst>
-    <p1510:client id="{B9057094-398D-4B4D-8481-BCA43F42E7D7}" v="58" dt="2025-08-06T08:37:35.929"/>
+    <p1510:client id="{CBD7F486-F03B-49E3-9BF9-0A1CAF4B67AB}" v="2" dt="2025-08-19T15:21:27.999"/>
   </p1510:revLst>
 </p1510:revInfo>
 </file>
@@ -1621,7 +1621,7 @@
           <a:p>
             <a:fld id="{3D7F8443-13F4-482C-B2FE-193E48B02849}" type="datetimeFigureOut">
               <a:rPr lang="en-US" smtClean="0"/>
-              <a:t>8/6/2025</a:t>
+              <a:t>8/19/2025</a:t>
             </a:fld>
             <a:endParaRPr lang="en-US"/>
           </a:p>
@@ -1819,7 +1819,7 @@
           <a:p>
             <a:fld id="{3D7F8443-13F4-482C-B2FE-193E48B02849}" type="datetimeFigureOut">
               <a:rPr lang="en-US" smtClean="0"/>
-              <a:t>8/6/2025</a:t>
+              <a:t>8/19/2025</a:t>
             </a:fld>
             <a:endParaRPr lang="en-US"/>
           </a:p>
@@ -2027,7 +2027,7 @@
           <a:p>
             <a:fld id="{3D7F8443-13F4-482C-B2FE-193E48B02849}" type="datetimeFigureOut">
               <a:rPr lang="en-US" smtClean="0"/>
-              <a:t>8/6/2025</a:t>
+              <a:t>8/19/2025</a:t>
             </a:fld>
             <a:endParaRPr lang="en-US"/>
           </a:p>
@@ -2225,7 +2225,7 @@
           <a:p>
             <a:fld id="{3D7F8443-13F4-482C-B2FE-193E48B02849}" type="datetimeFigureOut">
               <a:rPr lang="en-US" smtClean="0"/>
-              <a:t>8/6/2025</a:t>
+              <a:t>8/19/2025</a:t>
             </a:fld>
             <a:endParaRPr lang="en-US"/>
           </a:p>
@@ -2500,7 +2500,7 @@
           <a:p>
             <a:fld id="{3D7F8443-13F4-482C-B2FE-193E48B02849}" type="datetimeFigureOut">
               <a:rPr lang="en-US" smtClean="0"/>
-              <a:t>8/6/2025</a:t>
+              <a:t>8/19/2025</a:t>
             </a:fld>
             <a:endParaRPr lang="en-US"/>
           </a:p>
@@ -2765,7 +2765,7 @@
           <a:p>
             <a:fld id="{3D7F8443-13F4-482C-B2FE-193E48B02849}" type="datetimeFigureOut">
               <a:rPr lang="en-US" smtClean="0"/>
-              <a:t>8/6/2025</a:t>
+              <a:t>8/19/2025</a:t>
             </a:fld>
             <a:endParaRPr lang="en-US"/>
           </a:p>
@@ -3177,7 +3177,7 @@
           <a:p>
             <a:fld id="{3D7F8443-13F4-482C-B2FE-193E48B02849}" type="datetimeFigureOut">
               <a:rPr lang="en-US" smtClean="0"/>
-              <a:t>8/6/2025</a:t>
+              <a:t>8/19/2025</a:t>
             </a:fld>
             <a:endParaRPr lang="en-US"/>
           </a:p>
@@ -3318,7 +3318,7 @@
           <a:p>
             <a:fld id="{3D7F8443-13F4-482C-B2FE-193E48B02849}" type="datetimeFigureOut">
               <a:rPr lang="en-US" smtClean="0"/>
-              <a:t>8/6/2025</a:t>
+              <a:t>8/19/2025</a:t>
             </a:fld>
             <a:endParaRPr lang="en-US"/>
           </a:p>
@@ -3431,7 +3431,7 @@
           <a:p>
             <a:fld id="{3D7F8443-13F4-482C-B2FE-193E48B02849}" type="datetimeFigureOut">
               <a:rPr lang="en-US" smtClean="0"/>
-              <a:t>8/6/2025</a:t>
+              <a:t>8/19/2025</a:t>
             </a:fld>
             <a:endParaRPr lang="en-US"/>
           </a:p>
@@ -3742,7 +3742,7 @@
           <a:p>
             <a:fld id="{3D7F8443-13F4-482C-B2FE-193E48B02849}" type="datetimeFigureOut">
               <a:rPr lang="en-US" smtClean="0"/>
-              <a:t>8/6/2025</a:t>
+              <a:t>8/19/2025</a:t>
             </a:fld>
             <a:endParaRPr lang="en-US"/>
           </a:p>
@@ -4030,7 +4030,7 @@
           <a:p>
             <a:fld id="{3D7F8443-13F4-482C-B2FE-193E48B02849}" type="datetimeFigureOut">
               <a:rPr lang="en-US" smtClean="0"/>
-              <a:t>8/6/2025</a:t>
+              <a:t>8/19/2025</a:t>
             </a:fld>
             <a:endParaRPr lang="en-US"/>
           </a:p>
@@ -4271,7 +4271,7 @@
           <a:p>
             <a:fld id="{3D7F8443-13F4-482C-B2FE-193E48B02849}" type="datetimeFigureOut">
               <a:rPr lang="en-US" smtClean="0"/>
-              <a:t>8/6/2025</a:t>
+              <a:t>8/19/2025</a:t>
             </a:fld>
             <a:endParaRPr lang="en-US"/>
           </a:p>
@@ -4808,8 +4808,8 @@
           </a:p>
         </p:txBody>
       </p:sp>
-      <mc:AlternateContent xmlns:mc="http://schemas.openxmlformats.org/markup-compatibility/2006">
-        <mc:Choice xmlns:a14="http://schemas.microsoft.com/office/drawing/2010/main" Requires="a14">
+      <mc:AlternateContent xmlns:mc="http://schemas.openxmlformats.org/markup-compatibility/2006" xmlns:a14="http://schemas.microsoft.com/office/drawing/2010/main">
+        <mc:Choice Requires="a14">
           <p:sp>
             <p:nvSpPr>
               <p:cNvPr id="3" name="Content Placeholder 2">
@@ -4925,7 +4925,7 @@
             </p:txBody>
           </p:sp>
         </mc:Choice>
-        <mc:Fallback>
+        <mc:Fallback xmlns="">
           <p:sp>
             <p:nvSpPr>
               <p:cNvPr id="3" name="Content Placeholder 2">
@@ -5030,8 +5030,8 @@
             <a:chExt cx="905400" cy="752040"/>
           </a:xfrm>
         </p:grpSpPr>
-        <mc:AlternateContent xmlns:mc="http://schemas.openxmlformats.org/markup-compatibility/2006">
-          <mc:Choice xmlns:p14="http://schemas.microsoft.com/office/powerpoint/2010/main" Requires="p14">
+        <mc:AlternateContent xmlns:mc="http://schemas.openxmlformats.org/markup-compatibility/2006" xmlns:p14="http://schemas.microsoft.com/office/powerpoint/2010/main">
+          <mc:Choice Requires="p14">
             <p:contentPart p14:bwMode="auto" r:id="rId3">
               <p14:nvContentPartPr>
                 <p14:cNvPr id="6" name="Ink 5">
@@ -5050,7 +5050,7 @@
               </p14:xfrm>
             </p:contentPart>
           </mc:Choice>
-          <mc:Fallback>
+          <mc:Fallback xmlns="">
             <p:pic>
               <p:nvPicPr>
                 <p:cNvPr id="6" name="Ink 5">
@@ -5081,8 +5081,8 @@
             </p:pic>
           </mc:Fallback>
         </mc:AlternateContent>
-        <mc:AlternateContent xmlns:mc="http://schemas.openxmlformats.org/markup-compatibility/2006">
-          <mc:Choice xmlns:p14="http://schemas.microsoft.com/office/powerpoint/2010/main" Requires="p14">
+        <mc:AlternateContent xmlns:mc="http://schemas.openxmlformats.org/markup-compatibility/2006" xmlns:p14="http://schemas.microsoft.com/office/powerpoint/2010/main">
+          <mc:Choice Requires="p14">
             <p:contentPart p14:bwMode="auto" r:id="rId5">
               <p14:nvContentPartPr>
                 <p14:cNvPr id="7" name="Ink 6">
@@ -5101,7 +5101,7 @@
               </p14:xfrm>
             </p:contentPart>
           </mc:Choice>
-          <mc:Fallback>
+          <mc:Fallback xmlns="">
             <p:pic>
               <p:nvPicPr>
                 <p:cNvPr id="7" name="Ink 6">
@@ -5132,8 +5132,8 @@
             </p:pic>
           </mc:Fallback>
         </mc:AlternateContent>
-        <mc:AlternateContent xmlns:mc="http://schemas.openxmlformats.org/markup-compatibility/2006">
-          <mc:Choice xmlns:p14="http://schemas.microsoft.com/office/powerpoint/2010/main" Requires="p14">
+        <mc:AlternateContent xmlns:mc="http://schemas.openxmlformats.org/markup-compatibility/2006" xmlns:p14="http://schemas.microsoft.com/office/powerpoint/2010/main">
+          <mc:Choice Requires="p14">
             <p:contentPart p14:bwMode="auto" r:id="rId7">
               <p14:nvContentPartPr>
                 <p14:cNvPr id="8" name="Ink 7">
@@ -5152,7 +5152,7 @@
               </p14:xfrm>
             </p:contentPart>
           </mc:Choice>
-          <mc:Fallback>
+          <mc:Fallback xmlns="">
             <p:pic>
               <p:nvPicPr>
                 <p:cNvPr id="8" name="Ink 7">
@@ -5183,8 +5183,8 @@
             </p:pic>
           </mc:Fallback>
         </mc:AlternateContent>
-        <mc:AlternateContent xmlns:mc="http://schemas.openxmlformats.org/markup-compatibility/2006">
-          <mc:Choice xmlns:p14="http://schemas.microsoft.com/office/powerpoint/2010/main" Requires="p14">
+        <mc:AlternateContent xmlns:mc="http://schemas.openxmlformats.org/markup-compatibility/2006" xmlns:p14="http://schemas.microsoft.com/office/powerpoint/2010/main">
+          <mc:Choice Requires="p14">
             <p:contentPart p14:bwMode="auto" r:id="rId9">
               <p14:nvContentPartPr>
                 <p14:cNvPr id="9" name="Ink 8">
@@ -5203,7 +5203,7 @@
               </p14:xfrm>
             </p:contentPart>
           </mc:Choice>
-          <mc:Fallback>
+          <mc:Fallback xmlns="">
             <p:pic>
               <p:nvPicPr>
                 <p:cNvPr id="9" name="Ink 8">
@@ -5235,8 +5235,8 @@
           </mc:Fallback>
         </mc:AlternateContent>
       </p:grpSp>
-      <mc:AlternateContent xmlns:mc="http://schemas.openxmlformats.org/markup-compatibility/2006">
-        <mc:Choice xmlns:p14="http://schemas.microsoft.com/office/powerpoint/2010/main" Requires="p14">
+      <mc:AlternateContent xmlns:mc="http://schemas.openxmlformats.org/markup-compatibility/2006" xmlns:p14="http://schemas.microsoft.com/office/powerpoint/2010/main">
+        <mc:Choice Requires="p14">
           <p:contentPart p14:bwMode="auto" r:id="rId11">
             <p14:nvContentPartPr>
               <p14:cNvPr id="10" name="Ink 9">
@@ -5255,7 +5255,7 @@
             </p14:xfrm>
           </p:contentPart>
         </mc:Choice>
-        <mc:Fallback>
+        <mc:Fallback xmlns="">
           <p:pic>
             <p:nvPicPr>
               <p:cNvPr id="10" name="Ink 9">
@@ -10630,7 +10630,13 @@
               <a:rPr lang="en-US" dirty="0">
                 <a:hlinkClick r:id="rId13"/>
               </a:rPr>
-              <a:t>reddit post</a:t>
+              <a:t>reddit</a:t>
+            </a:r>
+            <a:r>
+              <a:rPr lang="en-US" dirty="0">
+                <a:hlinkClick r:id="rId13"/>
+              </a:rPr>
+              <a:t> post</a:t>
             </a:r>
             <a:endParaRPr lang="en-US" dirty="0"/>
           </a:p>
